--- a/Ngọc Nguyễn Duy - CS2205.JAN2026.DeCuong.FinalReport.Template.Slide.pptx
+++ b/Ngọc Nguyễn Duy - CS2205.JAN2026.DeCuong.FinalReport.Template.Slide.pptx
@@ -1064,7 +1064,7 @@
       </p:grpSpPr>
       <p:sp>
         <p:nvSpPr>
-          <p:cNvPr id="126" name="Google Shape;126;g3ecf1bc0f6b_1_63:notes"/>
+          <p:cNvPr id="126" name="Google Shape;126;g3ef00f64e94_2_0:notes"/>
           <p:cNvSpPr/>
           <p:nvPr>
             <p:ph idx="2" type="sldImg"/>
@@ -1109,7 +1109,7 @@
       </p:sp>
       <p:sp>
         <p:nvSpPr>
-          <p:cNvPr id="127" name="Google Shape;127;g3ecf1bc0f6b_1_63:notes"/>
+          <p:cNvPr id="127" name="Google Shape;127;g3ef00f64e94_2_0:notes"/>
           <p:cNvSpPr txBox="1"/>
           <p:nvPr>
             <p:ph idx="1" type="body"/>
@@ -16850,8 +16850,8 @@
         </p:nvSpPr>
         <p:spPr>
           <a:xfrm>
-            <a:off x="471900" y="820500"/>
-            <a:ext cx="8222100" cy="3908400"/>
+            <a:off x="0" y="820500"/>
+            <a:ext cx="9089100" cy="3908400"/>
           </a:xfrm>
           <a:prstGeom prst="rect">
             <a:avLst/>
@@ -16868,9 +16868,6 @@
           <a:lstStyle/>
           <a:p>
             <a:pPr indent="-368300" lvl="0" marL="457200" rtl="0" algn="l">
-              <a:lnSpc>
-                <a:spcPct val="115000"/>
-              </a:lnSpc>
               <a:spcBef>
                 <a:spcPts val="200"/>
               </a:spcBef>
@@ -16889,9 +16886,6 @@
           </a:p>
           <a:p>
             <a:pPr indent="-368300" lvl="0" marL="457200" rtl="0" algn="l">
-              <a:lnSpc>
-                <a:spcPct val="115000"/>
-              </a:lnSpc>
               <a:spcBef>
                 <a:spcPts val="200"/>
               </a:spcBef>
@@ -16904,15 +16898,21 @@
             </a:pPr>
             <a:r>
               <a:rPr lang="en"/>
-              <a:t>Link Github: https://github.com/mynameuit/CS2205.xxx/</a:t>
+              <a:t>Link Github: </a:t>
+            </a:r>
+            <a:r>
+              <a:rPr lang="en" u="sng">
+                <a:solidFill>
+                  <a:schemeClr val="hlink"/>
+                </a:solidFill>
+                <a:hlinkClick r:id="rId3"/>
+              </a:rPr>
+              <a:t>https://github.com/nguyenduyngocwork-ai/CS2205.JAN2026</a:t>
             </a:r>
             <a:endParaRPr/>
           </a:p>
           <a:p>
             <a:pPr indent="-368300" lvl="0" marL="457200" rtl="0" algn="l">
-              <a:lnSpc>
-                <a:spcPct val="115000"/>
-              </a:lnSpc>
               <a:spcBef>
                 <a:spcPts val="200"/>
               </a:spcBef>
@@ -16925,15 +16925,21 @@
             </a:pPr>
             <a:r>
               <a:rPr lang="en"/>
-              <a:t>Link YouTube video: (đang cập nhật)</a:t>
+              <a:t>Link YouTube video: </a:t>
+            </a:r>
+            <a:r>
+              <a:rPr lang="en" u="sng">
+                <a:solidFill>
+                  <a:schemeClr val="hlink"/>
+                </a:solidFill>
+                <a:hlinkClick r:id="rId4"/>
+              </a:rPr>
+              <a:t>https://youtu.be/fwVQGPlFwgc</a:t>
             </a:r>
             <a:endParaRPr/>
           </a:p>
           <a:p>
             <a:pPr indent="-368300" lvl="0" marL="457200" rtl="0" algn="l">
-              <a:lnSpc>
-                <a:spcPct val="115000"/>
-              </a:lnSpc>
               <a:spcBef>
                 <a:spcPts val="200"/>
               </a:spcBef>
@@ -23396,44 +23402,44 @@
 </file>
 
 <file path=ppt/theme/theme1.xml><?xml version="1.0" encoding="utf-8"?>
-<a:theme xmlns:a="http://schemas.openxmlformats.org/drawingml/2006/main" xmlns:r="http://schemas.openxmlformats.org/officeDocument/2006/relationships" name="Material - R01">
+<a:theme xmlns:a="http://schemas.openxmlformats.org/drawingml/2006/main" xmlns:r="http://schemas.openxmlformats.org/officeDocument/2006/relationships">
   <a:themeElements>
-    <a:clrScheme name="Material">
+    <a:clrScheme name="Default">
       <a:dk1>
-        <a:srgbClr val="4285F4"/>
+        <a:srgbClr val="000000"/>
       </a:dk1>
       <a:lt1>
         <a:srgbClr val="FFFFFF"/>
       </a:lt1>
       <a:dk2>
-        <a:srgbClr val="424242"/>
+        <a:srgbClr val="158158"/>
       </a:dk2>
       <a:lt2>
-        <a:srgbClr val="737373"/>
+        <a:srgbClr val="F3F3F3"/>
       </a:lt2>
       <a:accent1>
-        <a:srgbClr val="0277BD"/>
+        <a:srgbClr val="058DC7"/>
       </a:accent1>
       <a:accent2>
-        <a:srgbClr val="0F9D58"/>
+        <a:srgbClr val="50B432"/>
       </a:accent2>
       <a:accent3>
-        <a:srgbClr val="DB4437"/>
+        <a:srgbClr val="ED561B"/>
       </a:accent3>
       <a:accent4>
-        <a:srgbClr val="FAFAFA"/>
+        <a:srgbClr val="EDEF00"/>
       </a:accent4>
       <a:accent5>
-        <a:srgbClr val="4FC3F7"/>
+        <a:srgbClr val="24CBE5"/>
       </a:accent5>
       <a:accent6>
-        <a:srgbClr val="F4B400"/>
+        <a:srgbClr val="64E572"/>
       </a:accent6>
       <a:hlink>
-        <a:srgbClr val="4FC3F7"/>
+        <a:srgbClr val="2200CC"/>
       </a:hlink>
       <a:folHlink>
-        <a:srgbClr val="4FC3F7"/>
+        <a:srgbClr val="551A8B"/>
       </a:folHlink>
     </a:clrScheme>
     <a:fontScheme name="Office">
@@ -23675,44 +23681,44 @@
 </file>
 
 <file path=ppt/theme/theme2.xml><?xml version="1.0" encoding="utf-8"?>
-<a:theme xmlns:a="http://schemas.openxmlformats.org/drawingml/2006/main" xmlns:r="http://schemas.openxmlformats.org/officeDocument/2006/relationships">
+<a:theme xmlns:a="http://schemas.openxmlformats.org/drawingml/2006/main" xmlns:r="http://schemas.openxmlformats.org/officeDocument/2006/relationships" name="Material - R01">
   <a:themeElements>
-    <a:clrScheme name="Default">
+    <a:clrScheme name="Material">
       <a:dk1>
-        <a:srgbClr val="000000"/>
+        <a:srgbClr val="4285F4"/>
       </a:dk1>
       <a:lt1>
         <a:srgbClr val="FFFFFF"/>
       </a:lt1>
       <a:dk2>
-        <a:srgbClr val="158158"/>
+        <a:srgbClr val="424242"/>
       </a:dk2>
       <a:lt2>
-        <a:srgbClr val="F3F3F3"/>
+        <a:srgbClr val="737373"/>
       </a:lt2>
       <a:accent1>
-        <a:srgbClr val="058DC7"/>
+        <a:srgbClr val="0277BD"/>
       </a:accent1>
       <a:accent2>
-        <a:srgbClr val="50B432"/>
+        <a:srgbClr val="0F9D58"/>
       </a:accent2>
       <a:accent3>
-        <a:srgbClr val="ED561B"/>
+        <a:srgbClr val="DB4437"/>
       </a:accent3>
       <a:accent4>
-        <a:srgbClr val="EDEF00"/>
+        <a:srgbClr val="FAFAFA"/>
       </a:accent4>
       <a:accent5>
-        <a:srgbClr val="24CBE5"/>
+        <a:srgbClr val="4FC3F7"/>
       </a:accent5>
       <a:accent6>
-        <a:srgbClr val="64E572"/>
+        <a:srgbClr val="F4B400"/>
       </a:accent6>
       <a:hlink>
-        <a:srgbClr val="2200CC"/>
+        <a:srgbClr val="4FC3F7"/>
       </a:hlink>
       <a:folHlink>
-        <a:srgbClr val="551A8B"/>
+        <a:srgbClr val="4FC3F7"/>
       </a:folHlink>
     </a:clrScheme>
     <a:fontScheme name="Office">
